--- a/week-06/presentations/ppts/day-03-communicating-tradeoffs.pptx
+++ b/week-06/presentations/ppts/day-03-communicating-tradeoffs.pptx
@@ -5518,6 +5518,50 @@
           </a:p>
         </p:txBody>
       </p:sp>
+      <p:sp>
+        <p:nvSpPr>
+          <p:cNvPr id="3" name="Content Placeholder 2"/>
+          <p:cNvSpPr>
+            <a:spLocks noGrp="1"/>
+          </p:cNvSpPr>
+          <p:nvPr>
+            <p:ph idx="1"/>
+          </p:nvPr>
+        </p:nvSpPr>
+        <p:spPr/>
+        <p:txBody>
+          <a:bodyPr/>
+          <a:lstStyle/>
+          <a:p>
+            <a:pPr lvl="0" indent="0">
+              <a:buNone/>
+            </a:pPr>
+            <a:r>
+              <a:rPr>
+                <a:latin typeface="Courier"/>
+              </a:rPr>
+              <a:t># Trade-off brief: &lt;feature&gt;
+**For:** &lt;stakeholder&gt;  |  **From:** &lt;triad&gt;  |  **Date:** ...
+## The decision (1 sentence)
+We are choosing [X] over [Y], accepting [cost].
+## Why this matters to you (1–2 sentences in their currency)
+...
+## The choice
+- What we're doing: ...
+- What we're explicitly NOT doing: ...
+- The cost we're accepting: ...
+## What would change our mind
+&lt;concrete trigger&gt;
+## What we need from you
+☐ Approval to proceed
+☐ Specific concern to address
+☐ Information we don't have
+## Appendix (linked)
+- TCD §5 / TMD §X / SLO budget</a:t>
+            </a:r>
+          </a:p>
+        </p:txBody>
+      </p:sp>
     </p:spTree>
   </p:cSld>
 </p:sld>
@@ -5561,6 +5605,53 @@
             <a:r>
               <a:rPr/>
               <a:t>📝 Worked Brief (Async Audit Write for Compliance)</a:t>
+            </a:r>
+          </a:p>
+        </p:txBody>
+      </p:sp>
+      <p:sp>
+        <p:nvSpPr>
+          <p:cNvPr id="3" name="Content Placeholder 2"/>
+          <p:cNvSpPr>
+            <a:spLocks noGrp="1"/>
+          </p:cNvSpPr>
+          <p:nvPr>
+            <p:ph idx="1"/>
+          </p:nvPr>
+        </p:nvSpPr>
+        <p:spPr/>
+        <p:txBody>
+          <a:bodyPr/>
+          <a:lstStyle/>
+          <a:p>
+            <a:pPr lvl="0" indent="0">
+              <a:buNone/>
+            </a:pPr>
+            <a:r>
+              <a:rPr>
+                <a:latin typeface="Courier"/>
+              </a:rPr>
+              <a:t>## The decision
+Async audit write (1–10s lag) over synchronous to keep
+dispatcher reconcile screens fast.
+## Why this matters to you
+Affects audit-trail timing your SOC 2 process depends on.
+Audit events are still durable (Kafka topic + DLQ) — they
+just appear in audit store 1–10 seconds after the action.
+## The choice
+- Doing: Publish to Kafka topic at user-action; consumer
+writes to audit store within 1–10s.
+- NOT doing: Sync write on user's hot path (would add
+30–80ms; breaks p95 SLO).
+- Cost: A regulator querying within 5s of an event sees
+stale state.
+## What would change our mind
+A regulator or customer contractually requires sync audit
+visibility within &lt; 1 second.
+## What we need from you
+☐ Approval that 1–10s lag is acceptable for SOC 2
+☐ Confirmation of acceptable lag bound (we propose ≤10s p99)
+☐ Note of any contract requiring sync audit (we know of none)</a:t>
             </a:r>
           </a:p>
         </p:txBody>

--- a/week-06/presentations/ppts/day-03-communicating-tradeoffs.pptx
+++ b/week-06/presentations/ppts/day-03-communicating-tradeoffs.pptx
@@ -1446,7 +1446,7 @@
             </a:pPr>
             <a:r>
               <a:rPr/>
-              <a:t>By 16:00, every triad has SEP §3 — the 1-page brief.</a:t>
+              <a:t>By 16:00, every triad has SEP Section 3 — the 1-page brief.</a:t>
             </a:r>
           </a:p>
         </p:txBody>
@@ -5355,7 +5355,7 @@
             </a:pPr>
             <a:r>
               <a:rPr/>
-              <a:t>5 min: review TCD §5 + TMD trade-offs</a:t>
+              <a:t>5 min: review TCD Section 5 + TMD trade-offs</a:t>
             </a:r>
           </a:p>
           <a:p>
@@ -5557,7 +5557,7 @@
 ☐ Specific concern to address
 ☐ Information we don't have
 ## Appendix (linked)
-- TCD §5 / TMD §X / SLO budget</a:t>
+- TCD Section 5 / TMD SectionX / SLO budget</a:t>
             </a:r>
           </a:p>
         </p:txBody>
@@ -6019,7 +6019,7 @@
             </a:pPr>
             <a:r>
               <a:rPr/>
-              <a:t>🧿 AI in Role</a:t>
+              <a:t>🤖 AI in Role</a:t>
             </a:r>
           </a:p>
         </p:txBody>
@@ -6130,7 +6130,7 @@
             </a:pPr>
             <a:r>
               <a:rPr/>
-              <a:t>10 min: adopt / defer / reject + update §3</a:t>
+              <a:t>10 min: adopt / defer / reject + update Section 3</a:t>
             </a:r>
           </a:p>
           <a:p>
@@ -6331,7 +6331,7 @@
             </a:pPr>
             <a:r>
               <a:rPr/>
-              <a:t>SEP §3 drafted</a:t>
+              <a:t>SEP Section 3 drafted</a:t>
             </a:r>
           </a:p>
           <a:p>
@@ -6376,7 +6376,7 @@
             </a:pPr>
             <a:r>
               <a:rPr/>
-              <a:t>Bring to Day 4: SEP §§1–3. Tomorrow we prep for the Friday simulation using AI.</a:t>
+              <a:t>Bring to Day 4: SEP Sections 1–3. Tomorrow we prep for the Friday simulation using AI.</a:t>
             </a:r>
           </a:p>
         </p:txBody>
@@ -6676,7 +6676,7 @@
             </a:pPr>
             <a:r>
               <a:rPr/>
-              <a:t>Pin SEP §§1–2 + TCD §5 trade-offs on the wall</a:t>
+              <a:t>Pin SEP Sections 1–2 + TCD Section 5 trade-offs on the wall</a:t>
             </a:r>
           </a:p>
           <a:p>

--- a/week-06/presentations/ppts/day-03-communicating-tradeoffs.pptx
+++ b/week-06/presentations/ppts/day-03-communicating-tradeoffs.pptx
@@ -5355,7 +5355,7 @@
             </a:pPr>
             <a:r>
               <a:rPr/>
-              <a:t>5 min: review TCD Section 5 + TMD trade-offs</a:t>
+              <a:t>5 min: review Technical Concept Document (TCD) Section 5 + Technical Modeling Document (TMD) trade-offs</a:t>
             </a:r>
           </a:p>
           <a:p>
@@ -5780,7 +5780,7 @@
             </a:pPr>
             <a:r>
               <a:rPr/>
-              <a:t>5 min: appendix linkbox</a:t>
+              <a:t>5 min: appendix linkbox (e.g., a DLQ — dead-letter queue — reference)</a:t>
             </a:r>
           </a:p>
           <a:p>
@@ -6331,7 +6331,7 @@
             </a:pPr>
             <a:r>
               <a:rPr/>
-              <a:t>SEP Section 3 drafted</a:t>
+              <a:t>Stakeholder Engagement Plan (SEP) Section 3 drafted</a:t>
             </a:r>
           </a:p>
           <a:p>
@@ -6523,7 +6523,7 @@
             </a:pPr>
             <a:r>
               <a:rPr/>
-              <a:t>Translate a technical trade-off into the stakeholder’s currency</a:t>
+              <a:t>Translate a technical trade-off — say, an SLO (Service Level Objective) budget — into the stakeholder’s currency</a:t>
             </a:r>
           </a:p>
           <a:p>

--- a/week-06/presentations/ppts/day-03-communicating-tradeoffs.pptx
+++ b/week-06/presentations/ppts/day-03-communicating-tradeoffs.pptx
@@ -5636,10 +5636,10 @@
 dispatcher reconcile screens fast.
 ## Why this matters to you
 Affects audit-trail timing your SOC 2 process depends on.
-Audit events are still durable (Kafka topic + DLQ) — they
+Audit events are still durable (Event Hubs stream + DLQ) — they
 just appear in audit store 1–10 seconds after the action.
 ## The choice
-- Doing: Publish to Kafka topic at user-action; consumer
+- Doing: Publish to Event Hubs stream at user-action; consumer
 writes to audit store within 1–10s.
 - NOT doing: Sync write on user's hot path (would add
 30–80ms; breaks p95 SLO).
@@ -6020,6 +6020,42 @@
             <a:r>
               <a:rPr/>
               <a:t>🤖 AI in Role</a:t>
+            </a:r>
+          </a:p>
+        </p:txBody>
+      </p:sp>
+      <p:sp>
+        <p:nvSpPr>
+          <p:cNvPr id="3" name="Content Placeholder 2"/>
+          <p:cNvSpPr>
+            <a:spLocks noGrp="1"/>
+          </p:cNvSpPr>
+          <p:nvPr>
+            <p:ph idx="1"/>
+          </p:nvPr>
+        </p:nvSpPr>
+        <p:spPr/>
+        <p:txBody>
+          <a:bodyPr/>
+          <a:lstStyle/>
+          <a:p>
+            <a:pPr lvl="0" indent="0">
+              <a:buNone/>
+            </a:pPr>
+            <a:r>
+              <a:rPr>
+                <a:latin typeface="Courier"/>
+              </a:rPr>
+              <a:t>Role: &lt;stakeholder type — CFO, Compliance Lead, Sales VP&gt;
+Context: &lt;paste the brief&gt;
+Task: Read this as the named stakeholder.
+- First question you'd ask?
+- Concern that's unaddressed?
+- Word or phrase that loses you?
+Constraints:
+- Specific to the brief, not generic
+- Voice the stakeholder honestly
+Format: Numbered — Question / Concern / Word.</a:t>
             </a:r>
           </a:p>
         </p:txBody>

--- a/week-06/presentations/ppts/day-03-communicating-tradeoffs.pptx
+++ b/week-06/presentations/ppts/day-03-communicating-tradeoffs.pptx
@@ -626,7 +626,7 @@
             </a:pPr>
             <a:r>
               <a:rPr/>
-              <a:t>If a triad picks a low-power stakeholder, push them to a higher-power one.</a:t>
+              <a:t>If a quad picks a low-power stakeholder, push them to a higher-power one.</a:t>
             </a:r>
           </a:p>
         </p:txBody>
@@ -1446,7 +1446,7 @@
             </a:pPr>
             <a:r>
               <a:rPr/>
-              <a:t>By 16:00, every triad has SEP Section 3 — the 1-page brief.</a:t>
+              <a:t>By 16:00, every quad has SEP Section 3 — the 1-page brief.</a:t>
             </a:r>
           </a:p>
         </p:txBody>
@@ -5346,7 +5346,7 @@
             </a:pPr>
             <a:r>
               <a:rPr b="1"/>
-              <a:t>Triads • 40 minutes</a:t>
+              <a:t>Quads • 40 minutes</a:t>
             </a:r>
           </a:p>
           <a:p>
@@ -5541,7 +5541,7 @@
                 <a:latin typeface="Courier"/>
               </a:rPr>
               <a:t># Trade-off brief: &lt;feature&gt;
-**For:** &lt;stakeholder&gt;  |  **From:** &lt;triad&gt;  |  **Date:** ...
+**For:** &lt;stakeholder&gt;  |  **From:** &lt;quad&gt;  |  **Date:** ...
 ## The decision (1 sentence)
 We are choosing [X] over [Y], accepting [cost].
 ## Why this matters to you (1–2 sentences in their currency)
@@ -5726,7 +5726,7 @@
             </a:pPr>
             <a:r>
               <a:rPr b="1"/>
-              <a:t>Triads • 40 minutes</a:t>
+              <a:t>Quads • 40 minutes</a:t>
             </a:r>
           </a:p>
           <a:p>
@@ -5936,7 +5936,7 @@
             </a:pPr>
             <a:r>
               <a:rPr/>
-              <a:t>Reviewer triad reads the brief as if they were the stakeholder. They underline:</a:t>
+              <a:t>Reviewer quad reads the brief as if they were the stakeholder. They underline:</a:t>
             </a:r>
           </a:p>
           <a:p>
@@ -5972,7 +5972,7 @@
             </a:pPr>
             <a:r>
               <a:rPr/>
-              <a:t>Author triad listens; does not defend. Same Week-3 review discipline.</a:t>
+              <a:t>Author quad listens; does not defend. Same Week-3 review discipline.</a:t>
             </a:r>
           </a:p>
         </p:txBody>
@@ -6130,25 +6130,25 @@
             </a:pPr>
             <a:r>
               <a:rPr b="1"/>
-              <a:t>Triad pairs • 45 minutes • Wrap</a:t>
-            </a:r>
-          </a:p>
-          <a:p>
-            <a:pPr lvl="0" indent="0" marL="0">
-              <a:buNone/>
-            </a:pPr>
-            <a:r>
-              <a:rPr/>
-              <a:t>10 min: reviewer triad reads in role; underlines</a:t>
-            </a:r>
-          </a:p>
-          <a:p>
-            <a:pPr lvl="0" indent="0" marL="0">
-              <a:buNone/>
-            </a:pPr>
-            <a:r>
-              <a:rPr/>
-              <a:t>10 min: author triad listens to feedback</a:t>
+              <a:t>Quad pairs • 45 minutes • Wrap</a:t>
+            </a:r>
+          </a:p>
+          <a:p>
+            <a:pPr lvl="0" indent="0" marL="0">
+              <a:buNone/>
+            </a:pPr>
+            <a:r>
+              <a:rPr/>
+              <a:t>10 min: reviewer quad reads in role; underlines</a:t>
+            </a:r>
+          </a:p>
+          <a:p>
+            <a:pPr lvl="0" indent="0" marL="0">
+              <a:buNone/>
+            </a:pPr>
+            <a:r>
+              <a:rPr/>
+              <a:t>10 min: author quad listens to feedback</a:t>
             </a:r>
           </a:p>
           <a:p>
@@ -7276,7 +7276,7 @@
             </a:pPr>
             <a:r>
               <a:rPr b="1"/>
-              <a:t>Triads • 35 minutes</a:t>
+              <a:t>Quads • 35 minutes</a:t>
             </a:r>
           </a:p>
           <a:p>

--- a/week-06/presentations/ppts/day-03-communicating-tradeoffs.pptx
+++ b/week-06/presentations/ppts/day-03-communicating-tradeoffs.pptx
@@ -5346,7 +5346,7 @@
             </a:pPr>
             <a:r>
               <a:rPr b="1"/>
-              <a:t>Quads • 40 minutes</a:t>
+              <a:t>Quads • 50 minutes</a:t>
             </a:r>
           </a:p>
           <a:p>
@@ -5726,7 +5726,7 @@
             </a:pPr>
             <a:r>
               <a:rPr b="1"/>
-              <a:t>Quads • 40 minutes</a:t>
+              <a:t>Quads • 50 minutes</a:t>
             </a:r>
           </a:p>
           <a:p>
@@ -6130,7 +6130,7 @@
             </a:pPr>
             <a:r>
               <a:rPr b="1"/>
-              <a:t>Quad pairs • 45 minutes • Wrap</a:t>
+              <a:t>Quad pairs • 55 minutes • Wrap</a:t>
             </a:r>
           </a:p>
           <a:p>
@@ -7276,7 +7276,7 @@
             </a:pPr>
             <a:r>
               <a:rPr b="1"/>
-              <a:t>Quads • 35 minutes</a:t>
+              <a:t>Quads • 45 minutes</a:t>
             </a:r>
           </a:p>
           <a:p>

--- a/week-06/presentations/ppts/day-03-communicating-tradeoffs.pptx
+++ b/week-06/presentations/ppts/day-03-communicating-tradeoffs.pptx
@@ -5,7 +5,7 @@
     <p:sldMasterId id="2147483648" r:id="rId1"/>
   </p:sldMasterIdLst>
   <p:notesMasterIdLst>
-    <p:notesMasterId r:id="rId23"/>
+    <p:notesMasterId r:id="rId26"/>
   </p:notesMasterIdLst>
   <p:sldIdLst>
     <p:sldId id="256" r:id="rId2"/>
@@ -29,6 +29,9 @@
     <p:sldId id="274" r:id="rId20"/>
     <p:sldId id="275" r:id="rId21"/>
     <p:sldId id="276" r:id="rId22"/>
+    <p:sldId id="277" r:id="rId23"/>
+    <p:sldId id="278" r:id="rId24"/>
+    <p:sldId id="279" r:id="rId25"/>
   </p:sldIdLst>
   <p:sldSz cx="9144000" cy="5143500" type="screen16x9"/>
   <p:notesSz cx="6858000" cy="9144000"/>
@@ -626,7 +629,7 @@
             </a:pPr>
             <a:r>
               <a:rPr/>
-              <a:t>If a quad picks a low-power stakeholder, push them to a higher-power one.</a:t>
+              <a:t>The #1 failure mode is picking a “trade-off” that isn’t a decision — nobody can approve or block it, so the brief has no purpose. Push quads to phrase their pick as a yes/no question.</a:t>
             </a:r>
           </a:p>
         </p:txBody>
@@ -708,7 +711,7 @@
             </a:pPr>
             <a:r>
               <a:rPr/>
-              <a:t>Frame the block: the 1-page constraint is forcing. Set context briefly, then move into the teaching content.</a:t>
+              <a:t>These are the FieldPulse pairings from the lab. The point: a trade-off pitched to someone without authority is wasted effort. Cost-shaped calls go to the CFO; architectural posture goes to the Architect; risk/compliance goes to Compliance.</a:t>
             </a:r>
           </a:p>
         </p:txBody>
@@ -790,7 +793,7 @@
             </a:pPr>
             <a:r>
               <a:rPr/>
-              <a:t>If it doesn’t fit on one page, the trade-off isn’t sharp enough.</a:t>
+              <a:t>Predicting questions is the rehearsal. The hostile-question rule is the forcing function — it’s what separates a brief that survives the room from one that folds at the first pushback.</a:t>
             </a:r>
           </a:p>
         </p:txBody>
@@ -872,7 +875,7 @@
             </a:pPr>
             <a:r>
               <a:rPr/>
-              <a:t>Read this aloud. It’s clear, it’s specific, it asks for a decision.</a:t>
+              <a:t>If a quad picks a low-power stakeholder, push them to a higher-power one.</a:t>
             </a:r>
           </a:p>
         </p:txBody>
@@ -954,7 +957,7 @@
             </a:pPr>
             <a:r>
               <a:rPr/>
-              <a:t>Hold the page constraint. Cut, don’t add.</a:t>
+              <a:t>Frame the block: the 1-page constraint is forcing. Set context briefly, then move into the teaching content.</a:t>
             </a:r>
           </a:p>
         </p:txBody>
@@ -1036,7 +1039,7 @@
             </a:pPr>
             <a:r>
               <a:rPr/>
-              <a:t>Frame the block: read the brief as the stakeholder would. Set context briefly, then move into the teaching content.</a:t>
+              <a:t>If it doesn’t fit on one page, the trade-off isn’t sharp enough.</a:t>
             </a:r>
           </a:p>
         </p:txBody>
@@ -1118,7 +1121,7 @@
             </a:pPr>
             <a:r>
               <a:rPr/>
-              <a:t>In-role reading is the most useful review style for briefs.</a:t>
+              <a:t>Read this aloud. It’s clear, it’s specific, it asks for a decision.</a:t>
             </a:r>
           </a:p>
         </p:txBody>
@@ -1200,7 +1203,7 @@
             </a:pPr>
             <a:r>
               <a:rPr/>
-              <a:t>Add to Pattern Library. The “in-role” frame is reusable.</a:t>
+              <a:t>Hold the page constraint. Cut, don’t add.</a:t>
             </a:r>
           </a:p>
         </p:txBody>
@@ -1282,7 +1285,7 @@
             </a:pPr>
             <a:r>
               <a:rPr/>
-              <a:t>Wrap-share: read decision sentence aloud, name the unsure-question, name a word cut.</a:t>
+              <a:t>Frame the block: read the brief as the stakeholder would. Set context briefly, then move into the teaching content.</a:t>
             </a:r>
           </a:p>
         </p:txBody>
@@ -1364,7 +1367,7 @@
             </a:pPr>
             <a:r>
               <a:rPr/>
-              <a:t>Round-robin close: each person says one phrase they’d never use again with this stakeholder.</a:t>
+              <a:t>In-role reading is the most useful review style for briefs.</a:t>
             </a:r>
           </a:p>
         </p:txBody>
@@ -1528,6 +1531,252 @@
             </a:pPr>
             <a:r>
               <a:rPr/>
+              <a:t>Add to Pattern Library. The “in-role” frame is reusable.</a:t>
+            </a:r>
+          </a:p>
+        </p:txBody>
+      </p:sp>
+      <p:sp>
+        <p:nvSpPr>
+          <p:cNvPr id="4" name="Slide Number Placeholder 3"/>
+          <p:cNvSpPr>
+            <a:spLocks noGrp="1"/>
+          </p:cNvSpPr>
+          <p:nvPr>
+            <p:ph type="sldNum" sz="quarter" idx="10"/>
+          </p:nvPr>
+        </p:nvSpPr>
+        <p:spPr/>
+        <p:txBody>
+          <a:bodyPr/>
+          <a:lstStyle/>
+          <a:p>
+            <a:fld id="{18BDFEC3-8487-43E8-A154-7C12CBC1FFF2}" type="slidenum">
+              <a:rPr lang="en-US"/>
+              <a:t>21</a:t>
+            </a:fld>
+            <a:endParaRPr lang="en-US"/>
+          </a:p>
+        </p:txBody>
+      </p:sp>
+    </p:spTree>
+  </p:cSld>
+</p:notes>
+</file>
+
+<file path=ppt/notesSlides/notesSlide21.xml><?xml version="1.0" encoding="utf-8"?>
+<p:notes xmlns:a="http://schemas.openxmlformats.org/drawingml/2006/main" xmlns:r="http://schemas.openxmlformats.org/officeDocument/2006/relationships" xmlns:p="http://schemas.openxmlformats.org/presentationml/2006/main">
+  <p:cSld>
+    <p:spTree>
+      <p:nvGrpSpPr>
+        <p:cNvPr id="1" name=""/>
+        <p:cNvGrpSpPr/>
+        <p:nvPr/>
+      </p:nvGrpSpPr>
+      <p:grpSpPr>
+        <a:xfrm>
+          <a:off x="0" y="0"/>
+          <a:ext cx="0" cy="0"/>
+          <a:chOff x="0" y="0"/>
+          <a:chExt cx="0" cy="0"/>
+        </a:xfrm>
+      </p:grpSpPr>
+      <p:sp>
+        <p:nvSpPr>
+          <p:cNvPr id="2" name="Slide Image Placeholder 1"/>
+          <p:cNvSpPr>
+            <a:spLocks noGrp="1" noRot="1" noChangeAspect="1"/>
+          </p:cNvSpPr>
+          <p:nvPr>
+            <p:ph type="sldImg"/>
+          </p:nvPr>
+        </p:nvSpPr>
+        <p:spPr/>
+      </p:sp>
+      <p:sp>
+        <p:nvSpPr>
+          <p:cNvPr id="3" name="Notes Placeholder 2"/>
+          <p:cNvSpPr>
+            <a:spLocks noGrp="1"/>
+          </p:cNvSpPr>
+          <p:nvPr>
+            <p:ph type="body" idx="1"/>
+          </p:nvPr>
+        </p:nvSpPr>
+        <p:spPr/>
+        <p:txBody>
+          <a:bodyPr/>
+          <a:lstStyle/>
+          <a:p>
+            <a:pPr lvl="0" indent="0" marL="0">
+              <a:buNone/>
+            </a:pPr>
+            <a:r>
+              <a:rPr/>
+              <a:t>Wrap-share: read decision sentence aloud, name the unsure-question, name a word cut.</a:t>
+            </a:r>
+          </a:p>
+        </p:txBody>
+      </p:sp>
+      <p:sp>
+        <p:nvSpPr>
+          <p:cNvPr id="4" name="Slide Number Placeholder 3"/>
+          <p:cNvSpPr>
+            <a:spLocks noGrp="1"/>
+          </p:cNvSpPr>
+          <p:nvPr>
+            <p:ph type="sldNum" sz="quarter" idx="10"/>
+          </p:nvPr>
+        </p:nvSpPr>
+        <p:spPr/>
+        <p:txBody>
+          <a:bodyPr/>
+          <a:lstStyle/>
+          <a:p>
+            <a:fld id="{18BDFEC3-8487-43E8-A154-7C12CBC1FFF2}" type="slidenum">
+              <a:rPr lang="en-US"/>
+              <a:t>22</a:t>
+            </a:fld>
+            <a:endParaRPr lang="en-US"/>
+          </a:p>
+        </p:txBody>
+      </p:sp>
+    </p:spTree>
+  </p:cSld>
+</p:notes>
+</file>
+
+<file path=ppt/notesSlides/notesSlide22.xml><?xml version="1.0" encoding="utf-8"?>
+<p:notes xmlns:a="http://schemas.openxmlformats.org/drawingml/2006/main" xmlns:r="http://schemas.openxmlformats.org/officeDocument/2006/relationships" xmlns:p="http://schemas.openxmlformats.org/presentationml/2006/main">
+  <p:cSld>
+    <p:spTree>
+      <p:nvGrpSpPr>
+        <p:cNvPr id="1" name=""/>
+        <p:cNvGrpSpPr/>
+        <p:nvPr/>
+      </p:nvGrpSpPr>
+      <p:grpSpPr>
+        <a:xfrm>
+          <a:off x="0" y="0"/>
+          <a:ext cx="0" cy="0"/>
+          <a:chOff x="0" y="0"/>
+          <a:chExt cx="0" cy="0"/>
+        </a:xfrm>
+      </p:grpSpPr>
+      <p:sp>
+        <p:nvSpPr>
+          <p:cNvPr id="2" name="Slide Image Placeholder 1"/>
+          <p:cNvSpPr>
+            <a:spLocks noGrp="1" noRot="1" noChangeAspect="1"/>
+          </p:cNvSpPr>
+          <p:nvPr>
+            <p:ph type="sldImg"/>
+          </p:nvPr>
+        </p:nvSpPr>
+        <p:spPr/>
+      </p:sp>
+      <p:sp>
+        <p:nvSpPr>
+          <p:cNvPr id="3" name="Notes Placeholder 2"/>
+          <p:cNvSpPr>
+            <a:spLocks noGrp="1"/>
+          </p:cNvSpPr>
+          <p:nvPr>
+            <p:ph type="body" idx="1"/>
+          </p:nvPr>
+        </p:nvSpPr>
+        <p:spPr/>
+        <p:txBody>
+          <a:bodyPr/>
+          <a:lstStyle/>
+          <a:p>
+            <a:pPr lvl="0" indent="0" marL="0">
+              <a:buNone/>
+            </a:pPr>
+            <a:r>
+              <a:rPr/>
+              <a:t>Round-robin close: each person says one phrase they’d never use again with this stakeholder.</a:t>
+            </a:r>
+          </a:p>
+        </p:txBody>
+      </p:sp>
+      <p:sp>
+        <p:nvSpPr>
+          <p:cNvPr id="4" name="Slide Number Placeholder 3"/>
+          <p:cNvSpPr>
+            <a:spLocks noGrp="1"/>
+          </p:cNvSpPr>
+          <p:nvPr>
+            <p:ph type="sldNum" sz="quarter" idx="10"/>
+          </p:nvPr>
+        </p:nvSpPr>
+        <p:spPr/>
+        <p:txBody>
+          <a:bodyPr/>
+          <a:lstStyle/>
+          <a:p>
+            <a:fld id="{18BDFEC3-8487-43E8-A154-7C12CBC1FFF2}" type="slidenum">
+              <a:rPr lang="en-US"/>
+              <a:t>23</a:t>
+            </a:fld>
+            <a:endParaRPr lang="en-US"/>
+          </a:p>
+        </p:txBody>
+      </p:sp>
+    </p:spTree>
+  </p:cSld>
+</p:notes>
+</file>
+
+<file path=ppt/notesSlides/notesSlide23.xml><?xml version="1.0" encoding="utf-8"?>
+<p:notes xmlns:a="http://schemas.openxmlformats.org/drawingml/2006/main" xmlns:r="http://schemas.openxmlformats.org/officeDocument/2006/relationships" xmlns:p="http://schemas.openxmlformats.org/presentationml/2006/main">
+  <p:cSld>
+    <p:spTree>
+      <p:nvGrpSpPr>
+        <p:cNvPr id="1" name=""/>
+        <p:cNvGrpSpPr/>
+        <p:nvPr/>
+      </p:nvGrpSpPr>
+      <p:grpSpPr>
+        <a:xfrm>
+          <a:off x="0" y="0"/>
+          <a:ext cx="0" cy="0"/>
+          <a:chOff x="0" y="0"/>
+          <a:chExt cx="0" cy="0"/>
+        </a:xfrm>
+      </p:grpSpPr>
+      <p:sp>
+        <p:nvSpPr>
+          <p:cNvPr id="2" name="Slide Image Placeholder 1"/>
+          <p:cNvSpPr>
+            <a:spLocks noGrp="1" noRot="1" noChangeAspect="1"/>
+          </p:cNvSpPr>
+          <p:nvPr>
+            <p:ph type="sldImg"/>
+          </p:nvPr>
+        </p:nvSpPr>
+        <p:spPr/>
+      </p:sp>
+      <p:sp>
+        <p:nvSpPr>
+          <p:cNvPr id="3" name="Notes Placeholder 2"/>
+          <p:cNvSpPr>
+            <a:spLocks noGrp="1"/>
+          </p:cNvSpPr>
+          <p:nvPr>
+            <p:ph type="body" idx="1"/>
+          </p:nvPr>
+        </p:nvSpPr>
+        <p:spPr/>
+        <p:txBody>
+          <a:bodyPr/>
+          <a:lstStyle/>
+          <a:p>
+            <a:pPr lvl="0" indent="0" marL="0">
+              <a:buNone/>
+            </a:pPr>
+            <a:r>
+              <a:rPr/>
               <a:t>Open the floor. Use the prompt — “Which trade-off in your TCD would you most want to brief tomorrow?” — to invite one short reflection per voice. Keep it tight; this is closure, not new content.</a:t>
             </a:r>
           </a:p>
@@ -1550,7 +1799,7 @@
           <a:p>
             <a:fld id="{18BDFEC3-8487-43E8-A154-7C12CBC1FFF2}" type="slidenum">
               <a:rPr lang="en-US"/>
-              <a:t>21</a:t>
+              <a:t>24</a:t>
             </a:fld>
             <a:endParaRPr lang="en-US"/>
           </a:p>
@@ -5318,7 +5567,7 @@
             </a:pPr>
             <a:r>
               <a:rPr/>
-              <a:t>👥 Activity 2 — Pick + Predict</a:t>
+              <a:t>📚 Decision-Shaped — or Not?</a:t>
             </a:r>
           </a:p>
         </p:txBody>
@@ -5339,59 +5588,83 @@
           <a:lstStyle/>
           <a:p>
             <a:pPr lvl="0" indent="0" marL="0">
-              <a:spcBef>
-                <a:spcPts val="3000"/>
-              </a:spcBef>
-              <a:buNone/>
-            </a:pPr>
-            <a:r>
-              <a:rPr b="1"/>
-              <a:t>Quads • 50 minutes</a:t>
-            </a:r>
-          </a:p>
-          <a:p>
-            <a:pPr lvl="0" indent="0" marL="0">
-              <a:buNone/>
-            </a:pPr>
-            <a:r>
-              <a:rPr/>
-              <a:t>5 min: review Technical Concept Document (TCD) Section 5 + Technical Modeling Document (TMD) trade-offs</a:t>
-            </a:r>
-          </a:p>
-          <a:p>
-            <a:pPr lvl="0" indent="0" marL="0">
-              <a:buNone/>
-            </a:pPr>
-            <a:r>
-              <a:rPr/>
-              <a:t>10 min: pick the trade-off</a:t>
-            </a:r>
-          </a:p>
-          <a:p>
-            <a:pPr lvl="0" indent="0" marL="0">
-              <a:buNone/>
-            </a:pPr>
-            <a:r>
-              <a:rPr/>
-              <a:t>10 min: pick the stakeholder</a:t>
-            </a:r>
-          </a:p>
-          <a:p>
-            <a:pPr lvl="0" indent="0" marL="0">
-              <a:buNone/>
-            </a:pPr>
-            <a:r>
-              <a:rPr/>
-              <a:t>15 min: predict 5 questions, ranked, with at least 1 hostile</a:t>
-            </a:r>
-          </a:p>
-          <a:p>
-            <a:pPr lvl="0" indent="0" marL="0">
-              <a:buNone/>
-            </a:pPr>
-            <a:r>
-              <a:rPr/>
-              <a:t>⏱ 5 + 10 + 10 + 15</a:t>
+              <a:buNone/>
+            </a:pPr>
+            <a:r>
+              <a:rPr/>
+              <a:t>A real call ✅</a:t>
+            </a:r>
+          </a:p>
+          <a:p>
+            <a:pPr lvl="0" indent="0" marL="0">
+              <a:buNone/>
+            </a:pPr>
+            <a:r>
+              <a:rPr/>
+              <a:t>Not a decision ❌</a:t>
+            </a:r>
+          </a:p>
+          <a:p>
+            <a:pPr lvl="0" indent="0" marL="0">
+              <a:buNone/>
+            </a:pPr>
+            <a:r>
+              <a:rPr/>
+              <a:t>“Accept a 10-sec audit lag to keep writes async?”</a:t>
+            </a:r>
+          </a:p>
+          <a:p>
+            <a:pPr lvl="0" indent="0" marL="0">
+              <a:buNone/>
+            </a:pPr>
+            <a:r>
+              <a:rPr/>
+              <a:t>“We should have good performance”</a:t>
+            </a:r>
+          </a:p>
+          <a:p>
+            <a:pPr lvl="0" indent="0" marL="0">
+              <a:buNone/>
+            </a:pPr>
+            <a:r>
+              <a:rPr/>
+              <a:t>“Modular monolith, or a new service?”</a:t>
+            </a:r>
+          </a:p>
+          <a:p>
+            <a:pPr lvl="0" indent="0" marL="0">
+              <a:buNone/>
+            </a:pPr>
+            <a:r>
+              <a:rPr/>
+              <a:t>“Let’s follow best practices”</a:t>
+            </a:r>
+          </a:p>
+          <a:p>
+            <a:pPr lvl="0" indent="0" marL="0">
+              <a:buNone/>
+            </a:pPr>
+            <a:r>
+              <a:rPr/>
+              <a:t>“Active-passive or active-active across regions?”</a:t>
+            </a:r>
+          </a:p>
+          <a:p>
+            <a:pPr lvl="0" indent="0" marL="0">
+              <a:buNone/>
+            </a:pPr>
+            <a:r>
+              <a:rPr/>
+              <a:t>“Make it reliable”</a:t>
+            </a:r>
+          </a:p>
+          <a:p>
+            <a:pPr lvl="0" indent="0" marL="0">
+              <a:buNone/>
+            </a:pPr>
+            <a:r>
+              <a:rPr/>
+              <a:t>If the stakeholder can’t say yes or no to it, it’s not a trade-off brief — it’s a status update. Pick the one with a real call and a non-obvious cost.</a:t>
             </a:r>
           </a:p>
         </p:txBody>
@@ -5438,7 +5711,7 @@
             </a:pPr>
             <a:r>
               <a:rPr/>
-              <a:t>Block 3 — Draft the 1-Page Brief</a:t>
+              <a:t>🎯 Right Call → Right Person</a:t>
             </a:r>
           </a:p>
         </p:txBody>
@@ -5459,14 +5732,101 @@
           <a:lstStyle/>
           <a:p>
             <a:pPr lvl="0" indent="0" marL="0">
-              <a:spcBef>
-                <a:spcPts val="3000"/>
-              </a:spcBef>
-              <a:buNone/>
-            </a:pPr>
-            <a:r>
-              <a:rPr b="1"/>
-              <a:t>The 1-page constraint is forcing</a:t>
+              <a:buNone/>
+            </a:pPr>
+            <a:r>
+              <a:rPr/>
+              <a:t>Pull the stakeholder from your SEP Section 1 map. Match the kind of call to whoever owns it — and aim for a high-power quadrant (they can actually approve or block).</a:t>
+            </a:r>
+          </a:p>
+          <a:p>
+            <a:pPr lvl="0" indent="0" marL="0">
+              <a:buNone/>
+            </a:pPr>
+            <a:r>
+              <a:rPr/>
+              <a:t>Trade-off</a:t>
+            </a:r>
+          </a:p>
+          <a:p>
+            <a:pPr lvl="0" indent="0" marL="0">
+              <a:buNone/>
+            </a:pPr>
+            <a:r>
+              <a:rPr/>
+              <a:t>Who owns the call</a:t>
+            </a:r>
+          </a:p>
+          <a:p>
+            <a:pPr lvl="0" indent="0" marL="0">
+              <a:buNone/>
+            </a:pPr>
+            <a:r>
+              <a:rPr/>
+              <a:t>Async audit write (10-sec lag)</a:t>
+            </a:r>
+          </a:p>
+          <a:p>
+            <a:pPr lvl="0" indent="0" marL="0">
+              <a:buNone/>
+            </a:pPr>
+            <a:r>
+              <a:rPr/>
+              <a:t>Compliance Lead</a:t>
+            </a:r>
+          </a:p>
+          <a:p>
+            <a:pPr lvl="0" indent="0" marL="0">
+              <a:buNone/>
+            </a:pPr>
+            <a:r>
+              <a:rPr/>
+              <a:t>Modular monolith vs. new service</a:t>
+            </a:r>
+          </a:p>
+          <a:p>
+            <a:pPr lvl="0" indent="0" marL="0">
+              <a:buNone/>
+            </a:pPr>
+            <a:r>
+              <a:rPr/>
+              <a:t>Architect</a:t>
+            </a:r>
+          </a:p>
+          <a:p>
+            <a:pPr lvl="0" indent="0" marL="0">
+              <a:buNone/>
+            </a:pPr>
+            <a:r>
+              <a:rPr/>
+              <a:t>Denormalize ticket_ids</a:t>
+            </a:r>
+          </a:p>
+          <a:p>
+            <a:pPr lvl="0" indent="0" marL="0">
+              <a:buNone/>
+            </a:pPr>
+            <a:r>
+              <a:rPr/>
+              <a:t>Eng Director</a:t>
+            </a:r>
+          </a:p>
+          <a:p>
+            <a:pPr lvl="0" indent="0" marL="0">
+              <a:buNone/>
+            </a:pPr>
+            <a:r>
+              <a:rPr/>
+              <a:t>Active-passive vs. active-active</a:t>
+            </a:r>
+          </a:p>
+          <a:p>
+            <a:pPr lvl="0" indent="0" marL="0">
+              <a:buNone/>
+            </a:pPr>
+            <a:r>
+              <a:rPr/>
+              <a:t>CFO + Architect</a:t>
             </a:r>
           </a:p>
         </p:txBody>
@@ -5513,6 +5873,300 @@
             </a:pPr>
             <a:r>
               <a:rPr/>
+              <a:t>🤝 Predict Their First 5 Questions</a:t>
+            </a:r>
+          </a:p>
+        </p:txBody>
+      </p:sp>
+      <p:sp>
+        <p:nvSpPr>
+          <p:cNvPr id="3" name="Content Placeholder 2"/>
+          <p:cNvSpPr>
+            <a:spLocks noGrp="1"/>
+          </p:cNvSpPr>
+          <p:nvPr>
+            <p:ph idx="1"/>
+          </p:nvPr>
+        </p:nvSpPr>
+        <p:spPr/>
+        <p:txBody>
+          <a:bodyPr/>
+          <a:lstStyle/>
+          <a:p>
+            <a:pPr lvl="0" indent="0" marL="0">
+              <a:buNone/>
+            </a:pPr>
+            <a:r>
+              <a:rPr/>
+              <a:t>Rank by likelihood — what do they ask first, not eventually?</a:t>
+            </a:r>
+          </a:p>
+          <a:p>
+            <a:pPr lvl="0" indent="0" marL="0">
+              <a:buNone/>
+            </a:pPr>
+            <a:r>
+              <a:rPr/>
+              <a:t>Speak their currency — the CFO asks “what’s the dollar number?”; Compliance asks “what’s our exposure?”</a:t>
+            </a:r>
+          </a:p>
+          <a:p>
+            <a:pPr lvl="0" indent="0" marL="0">
+              <a:buNone/>
+            </a:pPr>
+            <a:r>
+              <a:rPr/>
+              <a:t>At least one hostile — if all 5 are friendly, you haven’t stress-tested the brief.</a:t>
+            </a:r>
+          </a:p>
+          <a:p>
+            <a:pPr lvl="0" indent="0" marL="0">
+              <a:buNone/>
+            </a:pPr>
+            <a:r>
+              <a:rPr/>
+              <a:t>Worked example — CFO on active-active: “What does it cost per year?” · “What actually breaks if we stay active-passive?” · “Who else is asking for this?” · “What’s the revenue at risk?” · “Can we defer it a quarter?”</a:t>
+            </a:r>
+          </a:p>
+        </p:txBody>
+      </p:sp>
+    </p:spTree>
+  </p:cSld>
+</p:sld>
+</file>
+
+<file path=ppt/slides/slide14.xml><?xml version="1.0" encoding="utf-8"?>
+<p:sld xmlns:a="http://schemas.openxmlformats.org/drawingml/2006/main" xmlns:r="http://schemas.openxmlformats.org/officeDocument/2006/relationships" xmlns:p="http://schemas.openxmlformats.org/presentationml/2006/main">
+  <p:cSld>
+    <p:spTree>
+      <p:nvGrpSpPr>
+        <p:cNvPr id="1" name=""/>
+        <p:cNvGrpSpPr/>
+        <p:nvPr/>
+      </p:nvGrpSpPr>
+      <p:grpSpPr>
+        <a:xfrm>
+          <a:off x="0" y="0"/>
+          <a:ext cx="0" cy="0"/>
+          <a:chOff x="0" y="0"/>
+          <a:chExt cx="0" cy="0"/>
+        </a:xfrm>
+      </p:grpSpPr>
+      <p:sp>
+        <p:nvSpPr>
+          <p:cNvPr id="2" name="Title 1"/>
+          <p:cNvSpPr>
+            <a:spLocks noGrp="1"/>
+          </p:cNvSpPr>
+          <p:nvPr>
+            <p:ph type="title"/>
+          </p:nvPr>
+        </p:nvSpPr>
+        <p:spPr/>
+        <p:txBody>
+          <a:bodyPr/>
+          <a:lstStyle/>
+          <a:p>
+            <a:pPr lvl="0" indent="0" marL="0">
+              <a:buNone/>
+            </a:pPr>
+            <a:r>
+              <a:rPr/>
+              <a:t>👥 Activity 2 — Pick + Predict</a:t>
+            </a:r>
+          </a:p>
+        </p:txBody>
+      </p:sp>
+      <p:sp>
+        <p:nvSpPr>
+          <p:cNvPr id="3" name="Content Placeholder 2"/>
+          <p:cNvSpPr>
+            <a:spLocks noGrp="1"/>
+          </p:cNvSpPr>
+          <p:nvPr>
+            <p:ph idx="1"/>
+          </p:nvPr>
+        </p:nvSpPr>
+        <p:spPr/>
+        <p:txBody>
+          <a:bodyPr/>
+          <a:lstStyle/>
+          <a:p>
+            <a:pPr lvl="0" indent="0" marL="0">
+              <a:spcBef>
+                <a:spcPts val="3000"/>
+              </a:spcBef>
+              <a:buNone/>
+            </a:pPr>
+            <a:r>
+              <a:rPr b="1"/>
+              <a:t>Quads • 50 minutes</a:t>
+            </a:r>
+          </a:p>
+          <a:p>
+            <a:pPr lvl="0" indent="0" marL="0">
+              <a:buNone/>
+            </a:pPr>
+            <a:r>
+              <a:rPr/>
+              <a:t>5 min: review Technical Concept Document (TCD) Section 5 + Technical Modeling Document (TMD) trade-offs</a:t>
+            </a:r>
+          </a:p>
+          <a:p>
+            <a:pPr lvl="0" indent="0" marL="0">
+              <a:buNone/>
+            </a:pPr>
+            <a:r>
+              <a:rPr/>
+              <a:t>10 min: pick the trade-off</a:t>
+            </a:r>
+          </a:p>
+          <a:p>
+            <a:pPr lvl="0" indent="0" marL="0">
+              <a:buNone/>
+            </a:pPr>
+            <a:r>
+              <a:rPr/>
+              <a:t>10 min: pick the stakeholder</a:t>
+            </a:r>
+          </a:p>
+          <a:p>
+            <a:pPr lvl="0" indent="0" marL="0">
+              <a:buNone/>
+            </a:pPr>
+            <a:r>
+              <a:rPr/>
+              <a:t>25 min: predict 5 questions, ranked, with at least 1 hostile</a:t>
+            </a:r>
+          </a:p>
+          <a:p>
+            <a:pPr lvl="0" indent="0" marL="0">
+              <a:buNone/>
+            </a:pPr>
+            <a:r>
+              <a:rPr/>
+              <a:t>⏱ 5 + 10 + 10 + 25</a:t>
+            </a:r>
+          </a:p>
+        </p:txBody>
+      </p:sp>
+    </p:spTree>
+  </p:cSld>
+</p:sld>
+</file>
+
+<file path=ppt/slides/slide15.xml><?xml version="1.0" encoding="utf-8"?>
+<p:sld xmlns:a="http://schemas.openxmlformats.org/drawingml/2006/main" xmlns:r="http://schemas.openxmlformats.org/officeDocument/2006/relationships" xmlns:p="http://schemas.openxmlformats.org/presentationml/2006/main">
+  <p:cSld>
+    <p:spTree>
+      <p:nvGrpSpPr>
+        <p:cNvPr id="1" name=""/>
+        <p:cNvGrpSpPr/>
+        <p:nvPr/>
+      </p:nvGrpSpPr>
+      <p:grpSpPr>
+        <a:xfrm>
+          <a:off x="0" y="0"/>
+          <a:ext cx="0" cy="0"/>
+          <a:chOff x="0" y="0"/>
+          <a:chExt cx="0" cy="0"/>
+        </a:xfrm>
+      </p:grpSpPr>
+      <p:sp>
+        <p:nvSpPr>
+          <p:cNvPr id="2" name="Title 1"/>
+          <p:cNvSpPr>
+            <a:spLocks noGrp="1"/>
+          </p:cNvSpPr>
+          <p:nvPr>
+            <p:ph type="title"/>
+          </p:nvPr>
+        </p:nvSpPr>
+        <p:spPr/>
+        <p:txBody>
+          <a:bodyPr/>
+          <a:lstStyle/>
+          <a:p>
+            <a:pPr lvl="0" indent="0" marL="0">
+              <a:buNone/>
+            </a:pPr>
+            <a:r>
+              <a:rPr/>
+              <a:t>Block 3 — Draft the 1-Page Brief</a:t>
+            </a:r>
+          </a:p>
+        </p:txBody>
+      </p:sp>
+      <p:sp>
+        <p:nvSpPr>
+          <p:cNvPr id="3" name="Content Placeholder 2"/>
+          <p:cNvSpPr>
+            <a:spLocks noGrp="1"/>
+          </p:cNvSpPr>
+          <p:nvPr>
+            <p:ph idx="1"/>
+          </p:nvPr>
+        </p:nvSpPr>
+        <p:spPr/>
+        <p:txBody>
+          <a:bodyPr/>
+          <a:lstStyle/>
+          <a:p>
+            <a:pPr lvl="0" indent="0" marL="0">
+              <a:spcBef>
+                <a:spcPts val="3000"/>
+              </a:spcBef>
+              <a:buNone/>
+            </a:pPr>
+            <a:r>
+              <a:rPr b="1"/>
+              <a:t>The 1-page constraint is forcing</a:t>
+            </a:r>
+          </a:p>
+        </p:txBody>
+      </p:sp>
+    </p:spTree>
+  </p:cSld>
+</p:sld>
+</file>
+
+<file path=ppt/slides/slide16.xml><?xml version="1.0" encoding="utf-8"?>
+<p:sld xmlns:a="http://schemas.openxmlformats.org/drawingml/2006/main" xmlns:r="http://schemas.openxmlformats.org/officeDocument/2006/relationships" xmlns:p="http://schemas.openxmlformats.org/presentationml/2006/main">
+  <p:cSld>
+    <p:spTree>
+      <p:nvGrpSpPr>
+        <p:cNvPr id="1" name=""/>
+        <p:cNvGrpSpPr/>
+        <p:nvPr/>
+      </p:nvGrpSpPr>
+      <p:grpSpPr>
+        <a:xfrm>
+          <a:off x="0" y="0"/>
+          <a:ext cx="0" cy="0"/>
+          <a:chOff x="0" y="0"/>
+          <a:chExt cx="0" cy="0"/>
+        </a:xfrm>
+      </p:grpSpPr>
+      <p:sp>
+        <p:nvSpPr>
+          <p:cNvPr id="2" name="Title 1"/>
+          <p:cNvSpPr>
+            <a:spLocks noGrp="1"/>
+          </p:cNvSpPr>
+          <p:nvPr>
+            <p:ph type="title"/>
+          </p:nvPr>
+        </p:nvSpPr>
+        <p:spPr/>
+        <p:txBody>
+          <a:bodyPr/>
+          <a:lstStyle/>
+          <a:p>
+            <a:pPr lvl="0" indent="0" marL="0">
+              <a:buNone/>
+            </a:pPr>
+            <a:r>
+              <a:rPr/>
               <a:t>📝 The 1-Page Template</a:t>
             </a:r>
           </a:p>
@@ -5567,7 +6221,7 @@
 </p:sld>
 </file>
 
-<file path=ppt/slides/slide14.xml><?xml version="1.0" encoding="utf-8"?>
+<file path=ppt/slides/slide17.xml><?xml version="1.0" encoding="utf-8"?>
 <p:sld xmlns:a="http://schemas.openxmlformats.org/drawingml/2006/main" xmlns:r="http://schemas.openxmlformats.org/officeDocument/2006/relationships" xmlns:p="http://schemas.openxmlformats.org/presentationml/2006/main">
   <p:cSld>
     <p:spTree>
@@ -5661,327 +6315,6 @@
 </p:sld>
 </file>
 
-<file path=ppt/slides/slide15.xml><?xml version="1.0" encoding="utf-8"?>
-<p:sld xmlns:a="http://schemas.openxmlformats.org/drawingml/2006/main" xmlns:r="http://schemas.openxmlformats.org/officeDocument/2006/relationships" xmlns:p="http://schemas.openxmlformats.org/presentationml/2006/main">
-  <p:cSld>
-    <p:spTree>
-      <p:nvGrpSpPr>
-        <p:cNvPr id="1" name=""/>
-        <p:cNvGrpSpPr/>
-        <p:nvPr/>
-      </p:nvGrpSpPr>
-      <p:grpSpPr>
-        <a:xfrm>
-          <a:off x="0" y="0"/>
-          <a:ext cx="0" cy="0"/>
-          <a:chOff x="0" y="0"/>
-          <a:chExt cx="0" cy="0"/>
-        </a:xfrm>
-      </p:grpSpPr>
-      <p:sp>
-        <p:nvSpPr>
-          <p:cNvPr id="2" name="Title 1"/>
-          <p:cNvSpPr>
-            <a:spLocks noGrp="1"/>
-          </p:cNvSpPr>
-          <p:nvPr>
-            <p:ph type="title"/>
-          </p:nvPr>
-        </p:nvSpPr>
-        <p:spPr/>
-        <p:txBody>
-          <a:bodyPr/>
-          <a:lstStyle/>
-          <a:p>
-            <a:pPr lvl="0" indent="0" marL="0">
-              <a:buNone/>
-            </a:pPr>
-            <a:r>
-              <a:rPr/>
-              <a:t>👥 Activity 3 — Draft the Brief</a:t>
-            </a:r>
-          </a:p>
-        </p:txBody>
-      </p:sp>
-      <p:sp>
-        <p:nvSpPr>
-          <p:cNvPr id="3" name="Content Placeholder 2"/>
-          <p:cNvSpPr>
-            <a:spLocks noGrp="1"/>
-          </p:cNvSpPr>
-          <p:nvPr>
-            <p:ph idx="1"/>
-          </p:nvPr>
-        </p:nvSpPr>
-        <p:spPr/>
-        <p:txBody>
-          <a:bodyPr/>
-          <a:lstStyle/>
-          <a:p>
-            <a:pPr lvl="0" indent="0" marL="0">
-              <a:spcBef>
-                <a:spcPts val="3000"/>
-              </a:spcBef>
-              <a:buNone/>
-            </a:pPr>
-            <a:r>
-              <a:rPr b="1"/>
-              <a:t>Quads • 50 minutes</a:t>
-            </a:r>
-          </a:p>
-          <a:p>
-            <a:pPr lvl="0" indent="0" marL="0">
-              <a:buNone/>
-            </a:pPr>
-            <a:r>
-              <a:rPr/>
-              <a:t>5 min: decision sentence</a:t>
-            </a:r>
-          </a:p>
-          <a:p>
-            <a:pPr lvl="0" indent="0" marL="0">
-              <a:buNone/>
-            </a:pPr>
-            <a:r>
-              <a:rPr/>
-              <a:t>10 min: why this matters (cross-check vs predicted Q1)</a:t>
-            </a:r>
-          </a:p>
-          <a:p>
-            <a:pPr lvl="0" indent="0" marL="0">
-              <a:buNone/>
-            </a:pPr>
-            <a:r>
-              <a:rPr/>
-              <a:t>10 min: doing / not doing / cost</a:t>
-            </a:r>
-          </a:p>
-          <a:p>
-            <a:pPr lvl="0" indent="0" marL="0">
-              <a:buNone/>
-            </a:pPr>
-            <a:r>
-              <a:rPr/>
-              <a:t>5 min: change-our-mind trigger</a:t>
-            </a:r>
-          </a:p>
-          <a:p>
-            <a:pPr lvl="0" indent="0" marL="0">
-              <a:buNone/>
-            </a:pPr>
-            <a:r>
-              <a:rPr/>
-              <a:t>5 min: what we need (specific checkboxes)</a:t>
-            </a:r>
-          </a:p>
-          <a:p>
-            <a:pPr lvl="0" indent="0" marL="0">
-              <a:buNone/>
-            </a:pPr>
-            <a:r>
-              <a:rPr/>
-              <a:t>5 min: appendix linkbox (e.g., a DLQ — dead-letter queue — reference)</a:t>
-            </a:r>
-          </a:p>
-          <a:p>
-            <a:pPr lvl="0" indent="0" marL="0">
-              <a:buNone/>
-            </a:pPr>
-            <a:r>
-              <a:rPr/>
-              <a:t>⏱ 5 + 10 + 10 + 5 + 5 + 5</a:t>
-            </a:r>
-          </a:p>
-        </p:txBody>
-      </p:sp>
-    </p:spTree>
-  </p:cSld>
-</p:sld>
-</file>
-
-<file path=ppt/slides/slide16.xml><?xml version="1.0" encoding="utf-8"?>
-<p:sld xmlns:a="http://schemas.openxmlformats.org/drawingml/2006/main" xmlns:r="http://schemas.openxmlformats.org/officeDocument/2006/relationships" xmlns:p="http://schemas.openxmlformats.org/presentationml/2006/main">
-  <p:cSld>
-    <p:spTree>
-      <p:nvGrpSpPr>
-        <p:cNvPr id="1" name=""/>
-        <p:cNvGrpSpPr/>
-        <p:nvPr/>
-      </p:nvGrpSpPr>
-      <p:grpSpPr>
-        <a:xfrm>
-          <a:off x="0" y="0"/>
-          <a:ext cx="0" cy="0"/>
-          <a:chOff x="0" y="0"/>
-          <a:chExt cx="0" cy="0"/>
-        </a:xfrm>
-      </p:grpSpPr>
-      <p:sp>
-        <p:nvSpPr>
-          <p:cNvPr id="2" name="Title 1"/>
-          <p:cNvSpPr>
-            <a:spLocks noGrp="1"/>
-          </p:cNvSpPr>
-          <p:nvPr>
-            <p:ph type="title"/>
-          </p:nvPr>
-        </p:nvSpPr>
-        <p:spPr/>
-        <p:txBody>
-          <a:bodyPr/>
-          <a:lstStyle/>
-          <a:p>
-            <a:pPr lvl="0" indent="0" marL="0">
-              <a:buNone/>
-            </a:pPr>
-            <a:r>
-              <a:rPr/>
-              <a:t>Block 4 — Cross-Review (in Role) + AI</a:t>
-            </a:r>
-          </a:p>
-        </p:txBody>
-      </p:sp>
-      <p:sp>
-        <p:nvSpPr>
-          <p:cNvPr id="3" name="Content Placeholder 2"/>
-          <p:cNvSpPr>
-            <a:spLocks noGrp="1"/>
-          </p:cNvSpPr>
-          <p:nvPr>
-            <p:ph idx="1"/>
-          </p:nvPr>
-        </p:nvSpPr>
-        <p:spPr/>
-        <p:txBody>
-          <a:bodyPr/>
-          <a:lstStyle/>
-          <a:p>
-            <a:pPr lvl="0" indent="0" marL="0">
-              <a:spcBef>
-                <a:spcPts val="3000"/>
-              </a:spcBef>
-              <a:buNone/>
-            </a:pPr>
-            <a:r>
-              <a:rPr b="1"/>
-              <a:t>Read the brief as the stakeholder would</a:t>
-            </a:r>
-          </a:p>
-        </p:txBody>
-      </p:sp>
-    </p:spTree>
-  </p:cSld>
-</p:sld>
-</file>
-
-<file path=ppt/slides/slide17.xml><?xml version="1.0" encoding="utf-8"?>
-<p:sld xmlns:a="http://schemas.openxmlformats.org/drawingml/2006/main" xmlns:r="http://schemas.openxmlformats.org/officeDocument/2006/relationships" xmlns:p="http://schemas.openxmlformats.org/presentationml/2006/main">
-  <p:cSld>
-    <p:spTree>
-      <p:nvGrpSpPr>
-        <p:cNvPr id="1" name=""/>
-        <p:cNvGrpSpPr/>
-        <p:nvPr/>
-      </p:nvGrpSpPr>
-      <p:grpSpPr>
-        <a:xfrm>
-          <a:off x="0" y="0"/>
-          <a:ext cx="0" cy="0"/>
-          <a:chOff x="0" y="0"/>
-          <a:chExt cx="0" cy="0"/>
-        </a:xfrm>
-      </p:grpSpPr>
-      <p:sp>
-        <p:nvSpPr>
-          <p:cNvPr id="2" name="Title 1"/>
-          <p:cNvSpPr>
-            <a:spLocks noGrp="1"/>
-          </p:cNvSpPr>
-          <p:nvPr>
-            <p:ph type="title"/>
-          </p:nvPr>
-        </p:nvSpPr>
-        <p:spPr/>
-        <p:txBody>
-          <a:bodyPr/>
-          <a:lstStyle/>
-          <a:p>
-            <a:pPr lvl="0" indent="0" marL="0">
-              <a:buNone/>
-            </a:pPr>
-            <a:r>
-              <a:rPr/>
-              <a:t>🗣️ In-Role Reading</a:t>
-            </a:r>
-          </a:p>
-        </p:txBody>
-      </p:sp>
-      <p:sp>
-        <p:nvSpPr>
-          <p:cNvPr id="3" name="Content Placeholder 2"/>
-          <p:cNvSpPr>
-            <a:spLocks noGrp="1"/>
-          </p:cNvSpPr>
-          <p:nvPr>
-            <p:ph idx="1"/>
-          </p:nvPr>
-        </p:nvSpPr>
-        <p:spPr/>
-        <p:txBody>
-          <a:bodyPr/>
-          <a:lstStyle/>
-          <a:p>
-            <a:pPr lvl="0" indent="0" marL="0">
-              <a:buNone/>
-            </a:pPr>
-            <a:r>
-              <a:rPr/>
-              <a:t>Reviewer quad reads the brief as if they were the stakeholder. They underline:</a:t>
-            </a:r>
-          </a:p>
-          <a:p>
-            <a:pPr lvl="0" indent="0" marL="0">
-              <a:buNone/>
-            </a:pPr>
-            <a:r>
-              <a:rPr/>
-              <a:t>Sentences that lose them (jargon, irrelevant, unclear)</a:t>
-            </a:r>
-          </a:p>
-          <a:p>
-            <a:pPr lvl="0" indent="0" marL="0">
-              <a:buNone/>
-            </a:pPr>
-            <a:r>
-              <a:rPr/>
-              <a:t>Sentences they’d push back on</a:t>
-            </a:r>
-          </a:p>
-          <a:p>
-            <a:pPr lvl="0" indent="0" marL="0">
-              <a:buNone/>
-            </a:pPr>
-            <a:r>
-              <a:rPr/>
-              <a:t>The first question they’d ask</a:t>
-            </a:r>
-          </a:p>
-          <a:p>
-            <a:pPr lvl="0" indent="0" marL="0">
-              <a:buNone/>
-            </a:pPr>
-            <a:r>
-              <a:rPr/>
-              <a:t>Author quad listens; does not defend. Same Week-3 review discipline.</a:t>
-            </a:r>
-          </a:p>
-        </p:txBody>
-      </p:sp>
-    </p:spTree>
-  </p:cSld>
-</p:sld>
-</file>
-
 <file path=ppt/slides/slide18.xml><?xml version="1.0" encoding="utf-8"?>
 <p:sld xmlns:a="http://schemas.openxmlformats.org/drawingml/2006/main" xmlns:r="http://schemas.openxmlformats.org/officeDocument/2006/relationships" xmlns:p="http://schemas.openxmlformats.org/presentationml/2006/main">
   <p:cSld>
@@ -6019,7 +6352,7 @@
             </a:pPr>
             <a:r>
               <a:rPr/>
-              <a:t>🤖 AI in Role</a:t>
+              <a:t>👥 Activity 3 — Draft the Brief</a:t>
             </a:r>
           </a:p>
         </p:txBody>
@@ -6039,23 +6372,78 @@
           <a:bodyPr/>
           <a:lstStyle/>
           <a:p>
-            <a:pPr lvl="0" indent="0">
-              <a:buNone/>
-            </a:pPr>
-            <a:r>
-              <a:rPr>
-                <a:latin typeface="Courier"/>
-              </a:rPr>
-              <a:t>Role: &lt;stakeholder type — CFO, Compliance Lead, Sales VP&gt;
-Context: &lt;paste the brief&gt;
-Task: Read this as the named stakeholder.
-- First question you'd ask?
-- Concern that's unaddressed?
-- Word or phrase that loses you?
-Constraints:
-- Specific to the brief, not generic
-- Voice the stakeholder honestly
-Format: Numbered — Question / Concern / Word.</a:t>
+            <a:pPr lvl="0" indent="0" marL="0">
+              <a:spcBef>
+                <a:spcPts val="3000"/>
+              </a:spcBef>
+              <a:buNone/>
+            </a:pPr>
+            <a:r>
+              <a:rPr b="1"/>
+              <a:t>Quads • 50 minutes</a:t>
+            </a:r>
+          </a:p>
+          <a:p>
+            <a:pPr lvl="0" indent="0" marL="0">
+              <a:buNone/>
+            </a:pPr>
+            <a:r>
+              <a:rPr/>
+              <a:t>5 min: decision sentence</a:t>
+            </a:r>
+          </a:p>
+          <a:p>
+            <a:pPr lvl="0" indent="0" marL="0">
+              <a:buNone/>
+            </a:pPr>
+            <a:r>
+              <a:rPr/>
+              <a:t>20 min: why this matters (cross-check vs predicted Q1)</a:t>
+            </a:r>
+          </a:p>
+          <a:p>
+            <a:pPr lvl="0" indent="0" marL="0">
+              <a:buNone/>
+            </a:pPr>
+            <a:r>
+              <a:rPr/>
+              <a:t>10 min: doing / not doing / cost</a:t>
+            </a:r>
+          </a:p>
+          <a:p>
+            <a:pPr lvl="0" indent="0" marL="0">
+              <a:buNone/>
+            </a:pPr>
+            <a:r>
+              <a:rPr/>
+              <a:t>5 min: change-our-mind trigger</a:t>
+            </a:r>
+          </a:p>
+          <a:p>
+            <a:pPr lvl="0" indent="0" marL="0">
+              <a:buNone/>
+            </a:pPr>
+            <a:r>
+              <a:rPr/>
+              <a:t>5 min: what we need (specific checkboxes)</a:t>
+            </a:r>
+          </a:p>
+          <a:p>
+            <a:pPr lvl="0" indent="0" marL="0">
+              <a:buNone/>
+            </a:pPr>
+            <a:r>
+              <a:rPr/>
+              <a:t>5 min: appendix linkbox (e.g., a DLQ — dead-letter queue — reference)</a:t>
+            </a:r>
+          </a:p>
+          <a:p>
+            <a:pPr lvl="0" indent="0" marL="0">
+              <a:buNone/>
+            </a:pPr>
+            <a:r>
+              <a:rPr/>
+              <a:t>⏱ 5 + 20 + 10 + 5 + 5 + 5</a:t>
             </a:r>
           </a:p>
         </p:txBody>
@@ -6102,7 +6490,7 @@
             </a:pPr>
             <a:r>
               <a:rPr/>
-              <a:t>👥 Activity 4 — In-Role Review + AI</a:t>
+              <a:t>Block 4 — Cross-Review (in Role) + AI</a:t>
             </a:r>
           </a:p>
         </p:txBody>
@@ -6130,52 +6518,7 @@
             </a:pPr>
             <a:r>
               <a:rPr b="1"/>
-              <a:t>Quad pairs • 55 minutes • Wrap</a:t>
-            </a:r>
-          </a:p>
-          <a:p>
-            <a:pPr lvl="0" indent="0" marL="0">
-              <a:buNone/>
-            </a:pPr>
-            <a:r>
-              <a:rPr/>
-              <a:t>10 min: reviewer quad reads in role; underlines</a:t>
-            </a:r>
-          </a:p>
-          <a:p>
-            <a:pPr lvl="0" indent="0" marL="0">
-              <a:buNone/>
-            </a:pPr>
-            <a:r>
-              <a:rPr/>
-              <a:t>10 min: author quad listens to feedback</a:t>
-            </a:r>
-          </a:p>
-          <a:p>
-            <a:pPr lvl="0" indent="0" marL="0">
-              <a:buNone/>
-            </a:pPr>
-            <a:r>
-              <a:rPr/>
-              <a:t>15 min: AI critique in role</a:t>
-            </a:r>
-          </a:p>
-          <a:p>
-            <a:pPr lvl="0" indent="0" marL="0">
-              <a:buNone/>
-            </a:pPr>
-            <a:r>
-              <a:rPr/>
-              <a:t>10 min: adopt / defer / reject + update Section 3</a:t>
-            </a:r>
-          </a:p>
-          <a:p>
-            <a:pPr lvl="0" indent="0" marL="0">
-              <a:buNone/>
-            </a:pPr>
-            <a:r>
-              <a:rPr/>
-              <a:t>⏱ 10 + 10 + 15 + 10 · 15-min wrap</a:t>
+              <a:t>Read the brief as the stakeholder would</a:t>
             </a:r>
           </a:p>
         </p:txBody>
@@ -6297,7 +6640,7 @@
             </a:pPr>
             <a:r>
               <a:rPr/>
-              <a:t>🎉 Day 3 Wrap</a:t>
+              <a:t>🗣️ In-Role Reading</a:t>
             </a:r>
           </a:p>
         </p:txBody>
@@ -6322,97 +6665,43 @@
             </a:pPr>
             <a:r>
               <a:rPr/>
-              <a:t>What we built</a:t>
-            </a:r>
-          </a:p>
-          <a:p>
-            <a:pPr lvl="0" indent="0" marL="0">
-              <a:buNone/>
-            </a:pPr>
-            <a:r>
-              <a:rPr/>
-              <a:t>Translation discipline (currency by stakeholder)</a:t>
-            </a:r>
-          </a:p>
-          <a:p>
-            <a:pPr lvl="0" indent="0" marL="0">
-              <a:buNone/>
-            </a:pPr>
-            <a:r>
-              <a:rPr/>
-              <a:t>“Need to know vs need to decide” frame</a:t>
-            </a:r>
-          </a:p>
-          <a:p>
-            <a:pPr lvl="0" indent="0" marL="0">
-              <a:buNone/>
-            </a:pPr>
-            <a:r>
-              <a:rPr/>
-              <a:t>1-page brief for one trade-off + stakeholder</a:t>
-            </a:r>
-          </a:p>
-          <a:p>
-            <a:pPr lvl="0" indent="0" marL="0">
-              <a:buNone/>
-            </a:pPr>
-            <a:r>
-              <a:rPr/>
-              <a:t>Cross-reviewed in role + AI-critiqued</a:t>
-            </a:r>
-          </a:p>
-          <a:p>
-            <a:pPr lvl="0" indent="0" marL="0">
-              <a:buNone/>
-            </a:pPr>
-            <a:r>
-              <a:rPr/>
-              <a:t>Stakeholder Engagement Plan (SEP) Section 3 drafted</a:t>
-            </a:r>
-          </a:p>
-          <a:p>
-            <a:pPr lvl="0" indent="0" marL="0">
-              <a:buNone/>
-            </a:pPr>
-            <a:r>
-              <a:rPr/>
-              <a:t>What opens tomorrow</a:t>
-            </a:r>
-          </a:p>
-          <a:p>
-            <a:pPr lvl="0" indent="0" marL="0">
-              <a:buNone/>
-            </a:pPr>
-            <a:r>
-              <a:rPr/>
-              <a:t>AI-augmented requirement summaries</a:t>
-            </a:r>
-          </a:p>
-          <a:p>
-            <a:pPr lvl="0" indent="0" marL="0">
-              <a:buNone/>
-            </a:pPr>
-            <a:r>
-              <a:rPr/>
-              <a:t>Meeting prep: prior context, predicted objections, opening</a:t>
-            </a:r>
-          </a:p>
-          <a:p>
-            <a:pPr lvl="0" indent="0" marL="0">
-              <a:buNone/>
-            </a:pPr>
-            <a:r>
-              <a:rPr/>
-              <a:t>Validation discipline (Wk 5 D5)</a:t>
-            </a:r>
-          </a:p>
-          <a:p>
-            <a:pPr lvl="0" indent="0" marL="0">
-              <a:buNone/>
-            </a:pPr>
-            <a:r>
-              <a:rPr/>
-              <a:t>Bring to Day 4: SEP Sections 1–3. Tomorrow we prep for the Friday simulation using AI.</a:t>
+              <a:t>Reviewer quad reads the brief as if they were the stakeholder. They underline:</a:t>
+            </a:r>
+          </a:p>
+          <a:p>
+            <a:pPr lvl="0" indent="0" marL="0">
+              <a:buNone/>
+            </a:pPr>
+            <a:r>
+              <a:rPr/>
+              <a:t>Sentences that lose them (jargon, irrelevant, unclear)</a:t>
+            </a:r>
+          </a:p>
+          <a:p>
+            <a:pPr lvl="0" indent="0" marL="0">
+              <a:buNone/>
+            </a:pPr>
+            <a:r>
+              <a:rPr/>
+              <a:t>Sentences they’d push back on</a:t>
+            </a:r>
+          </a:p>
+          <a:p>
+            <a:pPr lvl="0" indent="0" marL="0">
+              <a:buNone/>
+            </a:pPr>
+            <a:r>
+              <a:rPr/>
+              <a:t>The first question they’d ask</a:t>
+            </a:r>
+          </a:p>
+          <a:p>
+            <a:pPr lvl="0" indent="0" marL="0">
+              <a:buNone/>
+            </a:pPr>
+            <a:r>
+              <a:rPr/>
+              <a:t>Author quad listens; does not defend. Same Week-3 review discipline.</a:t>
             </a:r>
           </a:p>
         </p:txBody>
@@ -6459,6 +6748,371 @@
             </a:pPr>
             <a:r>
               <a:rPr/>
+              <a:t>🤖 AI in Role</a:t>
+            </a:r>
+          </a:p>
+        </p:txBody>
+      </p:sp>
+      <p:sp>
+        <p:nvSpPr>
+          <p:cNvPr id="3" name="Content Placeholder 2"/>
+          <p:cNvSpPr>
+            <a:spLocks noGrp="1"/>
+          </p:cNvSpPr>
+          <p:nvPr>
+            <p:ph idx="1"/>
+          </p:nvPr>
+        </p:nvSpPr>
+        <p:spPr/>
+        <p:txBody>
+          <a:bodyPr/>
+          <a:lstStyle/>
+          <a:p>
+            <a:pPr lvl="0" indent="0">
+              <a:buNone/>
+            </a:pPr>
+            <a:r>
+              <a:rPr>
+                <a:latin typeface="Courier"/>
+              </a:rPr>
+              <a:t>Role: &lt;stakeholder type — CFO, Compliance Lead, Sales VP&gt;
+Context: &lt;paste the brief&gt;
+Task: Read this as the named stakeholder.
+- First question you'd ask?
+- Concern that's unaddressed?
+- Word or phrase that loses you?
+Constraints:
+- Specific to the brief, not generic
+- Voice the stakeholder honestly
+Format: Numbered — Question / Concern / Word.</a:t>
+            </a:r>
+          </a:p>
+        </p:txBody>
+      </p:sp>
+    </p:spTree>
+  </p:cSld>
+</p:sld>
+</file>
+
+<file path=ppt/slides/slide22.xml><?xml version="1.0" encoding="utf-8"?>
+<p:sld xmlns:a="http://schemas.openxmlformats.org/drawingml/2006/main" xmlns:r="http://schemas.openxmlformats.org/officeDocument/2006/relationships" xmlns:p="http://schemas.openxmlformats.org/presentationml/2006/main">
+  <p:cSld>
+    <p:spTree>
+      <p:nvGrpSpPr>
+        <p:cNvPr id="1" name=""/>
+        <p:cNvGrpSpPr/>
+        <p:nvPr/>
+      </p:nvGrpSpPr>
+      <p:grpSpPr>
+        <a:xfrm>
+          <a:off x="0" y="0"/>
+          <a:ext cx="0" cy="0"/>
+          <a:chOff x="0" y="0"/>
+          <a:chExt cx="0" cy="0"/>
+        </a:xfrm>
+      </p:grpSpPr>
+      <p:sp>
+        <p:nvSpPr>
+          <p:cNvPr id="2" name="Title 1"/>
+          <p:cNvSpPr>
+            <a:spLocks noGrp="1"/>
+          </p:cNvSpPr>
+          <p:nvPr>
+            <p:ph type="title"/>
+          </p:nvPr>
+        </p:nvSpPr>
+        <p:spPr/>
+        <p:txBody>
+          <a:bodyPr/>
+          <a:lstStyle/>
+          <a:p>
+            <a:pPr lvl="0" indent="0" marL="0">
+              <a:buNone/>
+            </a:pPr>
+            <a:r>
+              <a:rPr/>
+              <a:t>👥 Activity 4 — In-Role Review + AI</a:t>
+            </a:r>
+          </a:p>
+        </p:txBody>
+      </p:sp>
+      <p:sp>
+        <p:nvSpPr>
+          <p:cNvPr id="3" name="Content Placeholder 2"/>
+          <p:cNvSpPr>
+            <a:spLocks noGrp="1"/>
+          </p:cNvSpPr>
+          <p:nvPr>
+            <p:ph idx="1"/>
+          </p:nvPr>
+        </p:nvSpPr>
+        <p:spPr/>
+        <p:txBody>
+          <a:bodyPr/>
+          <a:lstStyle/>
+          <a:p>
+            <a:pPr lvl="0" indent="0" marL="0">
+              <a:spcBef>
+                <a:spcPts val="3000"/>
+              </a:spcBef>
+              <a:buNone/>
+            </a:pPr>
+            <a:r>
+              <a:rPr b="1"/>
+              <a:t>Quad pairs • 55 minutes • Wrap</a:t>
+            </a:r>
+          </a:p>
+          <a:p>
+            <a:pPr lvl="0" indent="0" marL="0">
+              <a:buNone/>
+            </a:pPr>
+            <a:r>
+              <a:rPr/>
+              <a:t>10 min: reviewer quad reads in role; underlines</a:t>
+            </a:r>
+          </a:p>
+          <a:p>
+            <a:pPr lvl="0" indent="0" marL="0">
+              <a:buNone/>
+            </a:pPr>
+            <a:r>
+              <a:rPr/>
+              <a:t>10 min: author quad listens to feedback</a:t>
+            </a:r>
+          </a:p>
+          <a:p>
+            <a:pPr lvl="0" indent="0" marL="0">
+              <a:buNone/>
+            </a:pPr>
+            <a:r>
+              <a:rPr/>
+              <a:t>25 min: AI critique in role</a:t>
+            </a:r>
+          </a:p>
+          <a:p>
+            <a:pPr lvl="0" indent="0" marL="0">
+              <a:buNone/>
+            </a:pPr>
+            <a:r>
+              <a:rPr/>
+              <a:t>10 min: adopt / defer / reject + update Section 3</a:t>
+            </a:r>
+          </a:p>
+          <a:p>
+            <a:pPr lvl="0" indent="0" marL="0">
+              <a:buNone/>
+            </a:pPr>
+            <a:r>
+              <a:rPr/>
+              <a:t>⏱ 10 + 10 + 25 + 10 · 15-min wrap</a:t>
+            </a:r>
+          </a:p>
+        </p:txBody>
+      </p:sp>
+    </p:spTree>
+  </p:cSld>
+</p:sld>
+</file>
+
+<file path=ppt/slides/slide23.xml><?xml version="1.0" encoding="utf-8"?>
+<p:sld xmlns:a="http://schemas.openxmlformats.org/drawingml/2006/main" xmlns:r="http://schemas.openxmlformats.org/officeDocument/2006/relationships" xmlns:p="http://schemas.openxmlformats.org/presentationml/2006/main">
+  <p:cSld>
+    <p:spTree>
+      <p:nvGrpSpPr>
+        <p:cNvPr id="1" name=""/>
+        <p:cNvGrpSpPr/>
+        <p:nvPr/>
+      </p:nvGrpSpPr>
+      <p:grpSpPr>
+        <a:xfrm>
+          <a:off x="0" y="0"/>
+          <a:ext cx="0" cy="0"/>
+          <a:chOff x="0" y="0"/>
+          <a:chExt cx="0" cy="0"/>
+        </a:xfrm>
+      </p:grpSpPr>
+      <p:sp>
+        <p:nvSpPr>
+          <p:cNvPr id="2" name="Title 1"/>
+          <p:cNvSpPr>
+            <a:spLocks noGrp="1"/>
+          </p:cNvSpPr>
+          <p:nvPr>
+            <p:ph type="title"/>
+          </p:nvPr>
+        </p:nvSpPr>
+        <p:spPr/>
+        <p:txBody>
+          <a:bodyPr/>
+          <a:lstStyle/>
+          <a:p>
+            <a:pPr lvl="0" indent="0" marL="0">
+              <a:buNone/>
+            </a:pPr>
+            <a:r>
+              <a:rPr/>
+              <a:t>🎉 Day 3 Wrap</a:t>
+            </a:r>
+          </a:p>
+        </p:txBody>
+      </p:sp>
+      <p:sp>
+        <p:nvSpPr>
+          <p:cNvPr id="3" name="Content Placeholder 2"/>
+          <p:cNvSpPr>
+            <a:spLocks noGrp="1"/>
+          </p:cNvSpPr>
+          <p:nvPr>
+            <p:ph idx="1"/>
+          </p:nvPr>
+        </p:nvSpPr>
+        <p:spPr/>
+        <p:txBody>
+          <a:bodyPr/>
+          <a:lstStyle/>
+          <a:p>
+            <a:pPr lvl="0" indent="0" marL="0">
+              <a:buNone/>
+            </a:pPr>
+            <a:r>
+              <a:rPr/>
+              <a:t>What we built</a:t>
+            </a:r>
+          </a:p>
+          <a:p>
+            <a:pPr lvl="0" indent="0" marL="0">
+              <a:buNone/>
+            </a:pPr>
+            <a:r>
+              <a:rPr/>
+              <a:t>Translation discipline (currency by stakeholder)</a:t>
+            </a:r>
+          </a:p>
+          <a:p>
+            <a:pPr lvl="0" indent="0" marL="0">
+              <a:buNone/>
+            </a:pPr>
+            <a:r>
+              <a:rPr/>
+              <a:t>“Need to know vs need to decide” frame</a:t>
+            </a:r>
+          </a:p>
+          <a:p>
+            <a:pPr lvl="0" indent="0" marL="0">
+              <a:buNone/>
+            </a:pPr>
+            <a:r>
+              <a:rPr/>
+              <a:t>1-page brief for one trade-off + stakeholder</a:t>
+            </a:r>
+          </a:p>
+          <a:p>
+            <a:pPr lvl="0" indent="0" marL="0">
+              <a:buNone/>
+            </a:pPr>
+            <a:r>
+              <a:rPr/>
+              <a:t>Cross-reviewed in role + AI-critiqued</a:t>
+            </a:r>
+          </a:p>
+          <a:p>
+            <a:pPr lvl="0" indent="0" marL="0">
+              <a:buNone/>
+            </a:pPr>
+            <a:r>
+              <a:rPr/>
+              <a:t>Stakeholder Engagement Plan (SEP) Section 3 drafted</a:t>
+            </a:r>
+          </a:p>
+          <a:p>
+            <a:pPr lvl="0" indent="0" marL="0">
+              <a:buNone/>
+            </a:pPr>
+            <a:r>
+              <a:rPr/>
+              <a:t>What opens tomorrow</a:t>
+            </a:r>
+          </a:p>
+          <a:p>
+            <a:pPr lvl="0" indent="0" marL="0">
+              <a:buNone/>
+            </a:pPr>
+            <a:r>
+              <a:rPr/>
+              <a:t>AI-augmented requirement summaries</a:t>
+            </a:r>
+          </a:p>
+          <a:p>
+            <a:pPr lvl="0" indent="0" marL="0">
+              <a:buNone/>
+            </a:pPr>
+            <a:r>
+              <a:rPr/>
+              <a:t>Meeting prep: prior context, predicted objections, opening</a:t>
+            </a:r>
+          </a:p>
+          <a:p>
+            <a:pPr lvl="0" indent="0" marL="0">
+              <a:buNone/>
+            </a:pPr>
+            <a:r>
+              <a:rPr/>
+              <a:t>Validation discipline (Wk 5 D5)</a:t>
+            </a:r>
+          </a:p>
+          <a:p>
+            <a:pPr lvl="0" indent="0" marL="0">
+              <a:buNone/>
+            </a:pPr>
+            <a:r>
+              <a:rPr/>
+              <a:t>Bring to Day 4: SEP Sections 1–3. Tomorrow we prep for the Friday simulation using AI.</a:t>
+            </a:r>
+          </a:p>
+        </p:txBody>
+      </p:sp>
+    </p:spTree>
+  </p:cSld>
+</p:sld>
+</file>
+
+<file path=ppt/slides/slide24.xml><?xml version="1.0" encoding="utf-8"?>
+<p:sld xmlns:a="http://schemas.openxmlformats.org/drawingml/2006/main" xmlns:r="http://schemas.openxmlformats.org/officeDocument/2006/relationships" xmlns:p="http://schemas.openxmlformats.org/presentationml/2006/main">
+  <p:cSld>
+    <p:spTree>
+      <p:nvGrpSpPr>
+        <p:cNvPr id="1" name=""/>
+        <p:cNvGrpSpPr/>
+        <p:nvPr/>
+      </p:nvGrpSpPr>
+      <p:grpSpPr>
+        <a:xfrm>
+          <a:off x="0" y="0"/>
+          <a:ext cx="0" cy="0"/>
+          <a:chOff x="0" y="0"/>
+          <a:chExt cx="0" cy="0"/>
+        </a:xfrm>
+      </p:grpSpPr>
+      <p:sp>
+        <p:nvSpPr>
+          <p:cNvPr id="2" name="Title 1"/>
+          <p:cNvSpPr>
+            <a:spLocks noGrp="1"/>
+          </p:cNvSpPr>
+          <p:nvPr>
+            <p:ph type="title"/>
+          </p:nvPr>
+        </p:nvSpPr>
+        <p:spPr/>
+        <p:txBody>
+          <a:bodyPr/>
+          <a:lstStyle/>
+          <a:p>
+            <a:pPr lvl="0" indent="0" marL="0">
+              <a:buNone/>
+            </a:pPr>
+            <a:r>
+              <a:rPr/>
               <a:t>💬 Questions &amp; Reflection</a:t>
             </a:r>
           </a:p>
@@ -7303,7 +7957,7 @@
             </a:pPr>
             <a:r>
               <a:rPr/>
-              <a:t>20 min: translate using audience currency</a:t>
+              <a:t>30 min: translate using audience currency</a:t>
             </a:r>
           </a:p>
           <a:p>
@@ -7321,7 +7975,7 @@
             </a:pPr>
             <a:r>
               <a:rPr/>
-              <a:t>⏱ 5 + 20 + 10</a:t>
+              <a:t>⏱ 5 + 30 + 10</a:t>
             </a:r>
           </a:p>
         </p:txBody>
